--- a/INVESTOR_DECK.pptx
+++ b/INVESTOR_DECK.pptx
@@ -2320,7 +2320,7 @@
                 <a:ea typeface="Georgia" pitchFamily="34" charset="-122"/>
                 <a:cs typeface="Georgia" pitchFamily="34" charset="-120"/>
               </a:rPr>
-              <a:t>v18.9</a:t>
+              <a:t>v20</a:t>
             </a:r>
             <a:endParaRPr lang="en-US" sz="1800" dirty="0"/>
           </a:p>
@@ -8826,6 +8826,444 @@
           </a:p>
         </p:txBody>
       </p:sp>
+      <p:sp>
+        <p:nvSpPr>
+          <p:cNvPr id="54" name="Shape 52"/>
+          <p:cNvSpPr/>
+          <p:nvPr/>
+        </p:nvSpPr>
+        <p:spPr>
+          <a:xfrm>
+            <a:off x="164592" y="4572000"/>
+            <a:ext cx="2834640" cy="749808"/>
+          </a:xfrm>
+          <a:prstGeom prst="rect">
+            <a:avLst/>
+          </a:prstGeom>
+          <a:solidFill>
+            <a:srgbClr val="FFF7F2"/>
+          </a:solidFill>
+          <a:ln w="6350">
+            <a:solidFill>
+              <a:srgbClr val="EEDDD5"/>
+            </a:solidFill>
+            <a:prstDash val="solid"/>
+          </a:ln>
+          <a:effectLst>
+            <a:outerShdw sx="100000" sy="100000" kx="0" ky="0" algn="bl" rotWithShape="0" blurRad="101600" dist="38100" dir="8100000">
+              <a:srgbClr val="000000">
+                <a:alpha val="10000"/>
+              </a:srgbClr>
+            </a:outerShdw>
+          </a:effectLst>
+        </p:spPr>
+      </p:sp>
+      <p:sp>
+        <p:nvSpPr>
+          <p:cNvPr id="55" name="Text 53"/>
+          <p:cNvSpPr/>
+          <p:nvPr/>
+        </p:nvSpPr>
+        <p:spPr>
+          <a:xfrm>
+            <a:off x="274320" y="4718304"/>
+            <a:ext cx="347472" cy="347472"/>
+          </a:xfrm>
+          <a:prstGeom prst="rect">
+            <a:avLst/>
+          </a:prstGeom>
+          <a:noFill/>
+          <a:ln/>
+        </p:spPr>
+        <p:txBody>
+          <a:bodyPr wrap="square" lIns="0" tIns="0" rIns="0" bIns="0" rtlCol="0" anchor="ctr"/>
+          <a:lstStyle/>
+          <a:p>
+            <a:pPr indent="0" marL="0">
+              <a:buNone/>
+            </a:pPr>
+            <a:r>
+              <a:rPr lang="en-US" sz="1800" dirty="0">
+                <a:solidFill>
+                  <a:srgbClr val="000000"/>
+                </a:solidFill>
+              </a:rPr>
+              <a:t>✨</a:t>
+            </a:r>
+            <a:endParaRPr lang="en-US" sz="1800" dirty="0"/>
+          </a:p>
+        </p:txBody>
+      </p:sp>
+      <p:sp>
+        <p:nvSpPr>
+          <p:cNvPr id="56" name="Text 54"/>
+          <p:cNvSpPr/>
+          <p:nvPr/>
+        </p:nvSpPr>
+        <p:spPr>
+          <a:xfrm>
+            <a:off x="667512" y="4663440"/>
+            <a:ext cx="2212848" cy="256032"/>
+          </a:xfrm>
+          <a:prstGeom prst="rect">
+            <a:avLst/>
+          </a:prstGeom>
+          <a:noFill/>
+          <a:ln/>
+        </p:spPr>
+        <p:txBody>
+          <a:bodyPr wrap="square" lIns="0" tIns="0" rIns="0" bIns="0" rtlCol="0" anchor="ctr"/>
+          <a:lstStyle/>
+          <a:p>
+            <a:pPr indent="0" marL="0">
+              <a:buNone/>
+            </a:pPr>
+            <a:r>
+              <a:rPr lang="en-US" sz="1100" b="1" dirty="0">
+                <a:solidFill>
+                  <a:srgbClr val="1C0A00"/>
+                </a:solidFill>
+                <a:latin typeface="Calibri" pitchFamily="34" charset="0"/>
+                <a:ea typeface="Calibri" pitchFamily="34" charset="-122"/>
+                <a:cs typeface="Calibri" pitchFamily="34" charset="-120"/>
+              </a:rPr>
+              <a:t>Sacred Kitchen</a:t>
+            </a:r>
+            <a:endParaRPr lang="en-US" sz="1100" dirty="0"/>
+          </a:p>
+        </p:txBody>
+      </p:sp>
+      <p:sp>
+        <p:nvSpPr>
+          <p:cNvPr id="57" name="Text 55"/>
+          <p:cNvSpPr/>
+          <p:nvPr/>
+        </p:nvSpPr>
+        <p:spPr>
+          <a:xfrm>
+            <a:off x="667512" y="4937760"/>
+            <a:ext cx="2212848" cy="256032"/>
+          </a:xfrm>
+          <a:prstGeom prst="rect">
+            <a:avLst/>
+          </a:prstGeom>
+          <a:noFill/>
+          <a:ln/>
+        </p:spPr>
+        <p:txBody>
+          <a:bodyPr wrap="square" lIns="0" tIns="0" rIns="0" bIns="0" rtlCol="0" anchor="ctr"/>
+          <a:lstStyle/>
+          <a:p>
+            <a:pPr indent="0" marL="0">
+              <a:buNone/>
+            </a:pPr>
+            <a:r>
+              <a:rPr lang="en-US" sz="900" dirty="0">
+                <a:solidFill>
+                  <a:srgbClr val="7C6A5E"/>
+                </a:solidFill>
+                <a:latin typeface="Calibri" pitchFamily="34" charset="0"/>
+                <a:ea typeface="Calibri" pitchFamily="34" charset="-122"/>
+                <a:cs typeface="Calibri" pitchFamily="34" charset="-120"/>
+              </a:rPr>
+              <a:t>Temple prasadam &amp; sacred recipes</a:t>
+            </a:r>
+            <a:endParaRPr lang="en-US" sz="900" dirty="0"/>
+          </a:p>
+        </p:txBody>
+      </p:sp>
+      <p:sp>
+        <p:nvSpPr>
+          <p:cNvPr id="58" name="Shape 56"/>
+          <p:cNvSpPr/>
+          <p:nvPr/>
+        </p:nvSpPr>
+        <p:spPr>
+          <a:xfrm>
+            <a:off x="3154680" y="4572000"/>
+            <a:ext cx="2834640" cy="749808"/>
+          </a:xfrm>
+          <a:prstGeom prst="rect">
+            <a:avLst/>
+          </a:prstGeom>
+          <a:solidFill>
+            <a:srgbClr val="FFF7F2"/>
+          </a:solidFill>
+          <a:ln w="6350">
+            <a:solidFill>
+              <a:srgbClr val="EEDDD5"/>
+            </a:solidFill>
+            <a:prstDash val="solid"/>
+          </a:ln>
+          <a:effectLst>
+            <a:outerShdw sx="100000" sy="100000" kx="0" ky="0" algn="bl" rotWithShape="0" blurRad="101600" dist="38100" dir="8100000">
+              <a:srgbClr val="000000">
+                <a:alpha val="10000"/>
+              </a:srgbClr>
+            </a:outerShdw>
+          </a:effectLst>
+        </p:spPr>
+      </p:sp>
+      <p:sp>
+        <p:nvSpPr>
+          <p:cNvPr id="59" name="Text 57"/>
+          <p:cNvSpPr/>
+          <p:nvPr/>
+        </p:nvSpPr>
+        <p:spPr>
+          <a:xfrm>
+            <a:off x="3264408" y="4718304"/>
+            <a:ext cx="347472" cy="347472"/>
+          </a:xfrm>
+          <a:prstGeom prst="rect">
+            <a:avLst/>
+          </a:prstGeom>
+          <a:noFill/>
+          <a:ln/>
+        </p:spPr>
+        <p:txBody>
+          <a:bodyPr wrap="square" lIns="0" tIns="0" rIns="0" bIns="0" rtlCol="0" anchor="ctr"/>
+          <a:lstStyle/>
+          <a:p>
+            <a:pPr indent="0" marL="0">
+              <a:buNone/>
+            </a:pPr>
+            <a:r>
+              <a:rPr lang="en-US" sz="1800" dirty="0">
+                <a:solidFill>
+                  <a:srgbClr val="000000"/>
+                </a:solidFill>
+              </a:rPr>
+              <a:t>👨‍🍳</a:t>
+            </a:r>
+            <a:endParaRPr lang="en-US" sz="1800" dirty="0"/>
+          </a:p>
+        </p:txBody>
+      </p:sp>
+      <p:sp>
+        <p:nvSpPr>
+          <p:cNvPr id="60" name="Text 58"/>
+          <p:cNvSpPr/>
+          <p:nvPr/>
+        </p:nvSpPr>
+        <p:spPr>
+          <a:xfrm>
+            <a:off x="3657600" y="4663440"/>
+            <a:ext cx="2212848" cy="256032"/>
+          </a:xfrm>
+          <a:prstGeom prst="rect">
+            <a:avLst/>
+          </a:prstGeom>
+          <a:noFill/>
+          <a:ln/>
+        </p:spPr>
+        <p:txBody>
+          <a:bodyPr wrap="square" lIns="0" tIns="0" rIns="0" bIns="0" rtlCol="0" anchor="ctr"/>
+          <a:lstStyle/>
+          <a:p>
+            <a:pPr indent="0" marL="0">
+              <a:buNone/>
+            </a:pPr>
+            <a:r>
+              <a:rPr lang="en-US" sz="1100" b="1" dirty="0">
+                <a:solidFill>
+                  <a:srgbClr val="1C0A00"/>
+                </a:solidFill>
+                <a:latin typeface="Calibri" pitchFamily="34" charset="0"/>
+                <a:ea typeface="Calibri" pitchFamily="34" charset="-122"/>
+                <a:cs typeface="Calibri" pitchFamily="34" charset="-120"/>
+              </a:rPr>
+              <a:t>Cook Mode</a:t>
+            </a:r>
+            <a:endParaRPr lang="en-US" sz="1100" dirty="0"/>
+          </a:p>
+        </p:txBody>
+      </p:sp>
+      <p:sp>
+        <p:nvSpPr>
+          <p:cNvPr id="61" name="Text 59"/>
+          <p:cNvSpPr/>
+          <p:nvPr/>
+        </p:nvSpPr>
+        <p:spPr>
+          <a:xfrm>
+            <a:off x="3657600" y="4937760"/>
+            <a:ext cx="2212848" cy="256032"/>
+          </a:xfrm>
+          <a:prstGeom prst="rect">
+            <a:avLst/>
+          </a:prstGeom>
+          <a:noFill/>
+          <a:ln/>
+        </p:spPr>
+        <p:txBody>
+          <a:bodyPr wrap="square" lIns="0" tIns="0" rIns="0" bIns="0" rtlCol="0" anchor="ctr"/>
+          <a:lstStyle/>
+          <a:p>
+            <a:pPr indent="0" marL="0">
+              <a:buNone/>
+            </a:pPr>
+            <a:r>
+              <a:rPr lang="en-US" sz="900" dirty="0">
+                <a:solidFill>
+                  <a:srgbClr val="7C6A5E"/>
+                </a:solidFill>
+                <a:latin typeface="Calibri" pitchFamily="34" charset="0"/>
+                <a:ea typeface="Calibri" pitchFamily="34" charset="-122"/>
+                <a:cs typeface="Calibri" pitchFamily="34" charset="-120"/>
+              </a:rPr>
+              <a:t>Fullscreen guided step-by-step cooking</a:t>
+            </a:r>
+            <a:endParaRPr lang="en-US" sz="900" dirty="0"/>
+          </a:p>
+        </p:txBody>
+      </p:sp>
+      <p:sp>
+        <p:nvSpPr>
+          <p:cNvPr id="62" name="Shape 60"/>
+          <p:cNvSpPr/>
+          <p:nvPr/>
+        </p:nvSpPr>
+        <p:spPr>
+          <a:xfrm>
+            <a:off x="6144768" y="4572000"/>
+            <a:ext cx="2834640" cy="749808"/>
+          </a:xfrm>
+          <a:prstGeom prst="rect">
+            <a:avLst/>
+          </a:prstGeom>
+          <a:solidFill>
+            <a:srgbClr val="FFF7F2"/>
+          </a:solidFill>
+          <a:ln w="6350">
+            <a:solidFill>
+              <a:srgbClr val="EEDDD5"/>
+            </a:solidFill>
+            <a:prstDash val="solid"/>
+          </a:ln>
+          <a:effectLst>
+            <a:outerShdw sx="100000" sy="100000" kx="0" ky="0" algn="bl" rotWithShape="0" blurRad="101600" dist="38100" dir="8100000">
+              <a:srgbClr val="000000">
+                <a:alpha val="10000"/>
+              </a:srgbClr>
+            </a:outerShdw>
+          </a:effectLst>
+        </p:spPr>
+      </p:sp>
+      <p:sp>
+        <p:nvSpPr>
+          <p:cNvPr id="63" name="Text 61"/>
+          <p:cNvSpPr/>
+          <p:nvPr/>
+        </p:nvSpPr>
+        <p:spPr>
+          <a:xfrm>
+            <a:off x="6254496" y="4718304"/>
+            <a:ext cx="347472" cy="347472"/>
+          </a:xfrm>
+          <a:prstGeom prst="rect">
+            <a:avLst/>
+          </a:prstGeom>
+          <a:noFill/>
+          <a:ln/>
+        </p:spPr>
+        <p:txBody>
+          <a:bodyPr wrap="square" lIns="0" tIns="0" rIns="0" bIns="0" rtlCol="0" anchor="ctr"/>
+          <a:lstStyle/>
+          <a:p>
+            <a:pPr indent="0" marL="0">
+              <a:buNone/>
+            </a:pPr>
+            <a:r>
+              <a:rPr lang="en-US" sz="1800" dirty="0">
+                <a:solidFill>
+                  <a:srgbClr val="000000"/>
+                </a:solidFill>
+              </a:rPr>
+              <a:t>🎬</a:t>
+            </a:r>
+            <a:endParaRPr lang="en-US" sz="1800" dirty="0"/>
+          </a:p>
+        </p:txBody>
+      </p:sp>
+      <p:sp>
+        <p:nvSpPr>
+          <p:cNvPr id="64" name="Text 62"/>
+          <p:cNvSpPr/>
+          <p:nvPr/>
+        </p:nvSpPr>
+        <p:spPr>
+          <a:xfrm>
+            <a:off x="6647688" y="4663440"/>
+            <a:ext cx="2212848" cy="256032"/>
+          </a:xfrm>
+          <a:prstGeom prst="rect">
+            <a:avLst/>
+          </a:prstGeom>
+          <a:noFill/>
+          <a:ln/>
+        </p:spPr>
+        <p:txBody>
+          <a:bodyPr wrap="square" lIns="0" tIns="0" rIns="0" bIns="0" rtlCol="0" anchor="ctr"/>
+          <a:lstStyle/>
+          <a:p>
+            <a:pPr indent="0" marL="0">
+              <a:buNone/>
+            </a:pPr>
+            <a:r>
+              <a:rPr lang="en-US" sz="1100" b="1" dirty="0">
+                <a:solidFill>
+                  <a:srgbClr val="1C0A00"/>
+                </a:solidFill>
+                <a:latin typeface="Calibri" pitchFamily="34" charset="0"/>
+                <a:ea typeface="Calibri" pitchFamily="34" charset="-122"/>
+                <a:cs typeface="Calibri" pitchFamily="34" charset="-120"/>
+              </a:rPr>
+              <a:t>Recipe Videos</a:t>
+            </a:r>
+            <a:endParaRPr lang="en-US" sz="1100" dirty="0"/>
+          </a:p>
+        </p:txBody>
+      </p:sp>
+      <p:sp>
+        <p:nvSpPr>
+          <p:cNvPr id="65" name="Text 63"/>
+          <p:cNvSpPr/>
+          <p:nvPr/>
+        </p:nvSpPr>
+        <p:spPr>
+          <a:xfrm>
+            <a:off x="6647688" y="4937760"/>
+            <a:ext cx="2212848" cy="256032"/>
+          </a:xfrm>
+          <a:prstGeom prst="rect">
+            <a:avLst/>
+          </a:prstGeom>
+          <a:noFill/>
+          <a:ln/>
+        </p:spPr>
+        <p:txBody>
+          <a:bodyPr wrap="square" lIns="0" tIns="0" rIns="0" bIns="0" rtlCol="0" anchor="ctr"/>
+          <a:lstStyle/>
+          <a:p>
+            <a:pPr indent="0" marL="0">
+              <a:buNone/>
+            </a:pPr>
+            <a:r>
+              <a:rPr lang="en-US" sz="900" dirty="0">
+                <a:solidFill>
+                  <a:srgbClr val="7C6A5E"/>
+                </a:solidFill>
+                <a:latin typeface="Calibri" pitchFamily="34" charset="0"/>
+                <a:ea typeface="Calibri" pitchFamily="34" charset="-122"/>
+                <a:cs typeface="Calibri" pitchFamily="34" charset="-120"/>
+              </a:rPr>
+              <a:t>YouTube search — ranked by engagement</a:t>
+            </a:r>
+            <a:endParaRPr lang="en-US" sz="900" dirty="0"/>
+          </a:p>
+        </p:txBody>
+      </p:sp>
     </p:spTree>
   </p:cSld>
   <p:clrMapOvr>
@@ -9762,7 +10200,7 @@
                 <a:ea typeface="Georgia" pitchFamily="34" charset="-122"/>
                 <a:cs typeface="Georgia" pitchFamily="34" charset="-120"/>
               </a:rPr>
-              <a:t>v18.9</a:t>
+              <a:t>v20</a:t>
             </a:r>
             <a:endParaRPr lang="en-US" sz="3000" dirty="0"/>
           </a:p>
@@ -9897,7 +10335,7 @@
                 <a:ea typeface="Georgia" pitchFamily="34" charset="-122"/>
                 <a:cs typeface="Georgia" pitchFamily="34" charset="-120"/>
               </a:rPr>
-              <a:t>90</a:t>
+              <a:t>90+</a:t>
             </a:r>
             <a:endParaRPr lang="en-US" sz="3000" dirty="0"/>
           </a:p>
@@ -10032,7 +10470,7 @@
                 <a:ea typeface="Georgia" pitchFamily="34" charset="-122"/>
                 <a:cs typeface="Georgia" pitchFamily="34" charset="-120"/>
               </a:rPr>
-              <a:t>13</a:t>
+              <a:t>14</a:t>
             </a:r>
             <a:endParaRPr lang="en-US" sz="3000" dirty="0"/>
           </a:p>
@@ -10167,7 +10605,7 @@
                 <a:ea typeface="Georgia" pitchFamily="34" charset="-122"/>
                 <a:cs typeface="Georgia" pitchFamily="34" charset="-120"/>
               </a:rPr>
-              <a:t>9</a:t>
+              <a:t>7</a:t>
             </a:r>
             <a:endParaRPr lang="en-US" sz="3000" dirty="0"/>
           </a:p>
@@ -10782,6 +11220,162 @@
                 <a:cs typeface="Calibri" pitchFamily="34" charset="-120"/>
               </a:rPr>
               <a:t>✅ Google Analytics GA4 live — measurement ID active (G-ERSLLHSXCL)</a:t>
+            </a:r>
+            <a:endParaRPr lang="en-US" sz="1000" dirty="0"/>
+          </a:p>
+        </p:txBody>
+      </p:sp>
+      <p:sp>
+        <p:nvSpPr>
+          <p:cNvPr id="38" name="Text 36"/>
+          <p:cNvSpPr/>
+          <p:nvPr/>
+        </p:nvSpPr>
+        <p:spPr>
+          <a:xfrm>
+            <a:off x="320040" y="4663440"/>
+            <a:ext cx="8503920" cy="256032"/>
+          </a:xfrm>
+          <a:prstGeom prst="rect">
+            <a:avLst/>
+          </a:prstGeom>
+          <a:noFill/>
+          <a:ln/>
+        </p:spPr>
+        <p:txBody>
+          <a:bodyPr wrap="square" lIns="0" tIns="0" rIns="0" bIns="0" rtlCol="0" anchor="ctr"/>
+          <a:lstStyle/>
+          <a:p>
+            <a:pPr indent="0" marL="0">
+              <a:buNone/>
+            </a:pPr>
+            <a:r>
+              <a:rPr lang="en-US" sz="1000" dirty="0">
+                <a:solidFill>
+                  <a:srgbClr val="7C6A5E"/>
+                </a:solidFill>
+                <a:latin typeface="Calibri" pitchFamily="34" charset="0"/>
+                <a:ea typeface="Calibri" pitchFamily="34" charset="-122"/>
+                <a:cs typeface="Calibri" pitchFamily="34" charset="-120"/>
+              </a:rPr>
+              <a:t>✅ Sacred Kitchen — temple &amp; prasadam recipes across all traditions</a:t>
+            </a:r>
+            <a:endParaRPr lang="en-US" sz="1000" dirty="0"/>
+          </a:p>
+        </p:txBody>
+      </p:sp>
+      <p:sp>
+        <p:nvSpPr>
+          <p:cNvPr id="39" name="Text 37"/>
+          <p:cNvSpPr/>
+          <p:nvPr/>
+        </p:nvSpPr>
+        <p:spPr>
+          <a:xfrm>
+            <a:off x="320040" y="4983480"/>
+            <a:ext cx="8503920" cy="256032"/>
+          </a:xfrm>
+          <a:prstGeom prst="rect">
+            <a:avLst/>
+          </a:prstGeom>
+          <a:noFill/>
+          <a:ln/>
+        </p:spPr>
+        <p:txBody>
+          <a:bodyPr wrap="square" lIns="0" tIns="0" rIns="0" bIns="0" rtlCol="0" anchor="ctr"/>
+          <a:lstStyle/>
+          <a:p>
+            <a:pPr indent="0" marL="0">
+              <a:buNone/>
+            </a:pPr>
+            <a:r>
+              <a:rPr lang="en-US" sz="1000" dirty="0">
+                <a:solidFill>
+                  <a:srgbClr val="7C6A5E"/>
+                </a:solidFill>
+                <a:latin typeface="Calibri" pitchFamily="34" charset="0"/>
+                <a:ea typeface="Calibri" pitchFamily="34" charset="-122"/>
+                <a:cs typeface="Calibri" pitchFamily="34" charset="-120"/>
+              </a:rPr>
+              <a:t>✅ Cook Mode — fullscreen step-by-step guided cooking experience</a:t>
+            </a:r>
+            <a:endParaRPr lang="en-US" sz="1000" dirty="0"/>
+          </a:p>
+        </p:txBody>
+      </p:sp>
+      <p:sp>
+        <p:nvSpPr>
+          <p:cNvPr id="40" name="Text 38"/>
+          <p:cNvSpPr/>
+          <p:nvPr/>
+        </p:nvSpPr>
+        <p:spPr>
+          <a:xfrm>
+            <a:off x="320040" y="5303520"/>
+            <a:ext cx="8503920" cy="256032"/>
+          </a:xfrm>
+          <a:prstGeom prst="rect">
+            <a:avLst/>
+          </a:prstGeom>
+          <a:noFill/>
+          <a:ln/>
+        </p:spPr>
+        <p:txBody>
+          <a:bodyPr wrap="square" lIns="0" tIns="0" rIns="0" bIns="0" rtlCol="0" anchor="ctr"/>
+          <a:lstStyle/>
+          <a:p>
+            <a:pPr indent="0" marL="0">
+              <a:buNone/>
+            </a:pPr>
+            <a:r>
+              <a:rPr lang="en-US" sz="1000" dirty="0">
+                <a:solidFill>
+                  <a:srgbClr val="7C6A5E"/>
+                </a:solidFill>
+                <a:latin typeface="Calibri" pitchFamily="34" charset="0"/>
+                <a:ea typeface="Calibri" pitchFamily="34" charset="-122"/>
+                <a:cs typeface="Calibri" pitchFamily="34" charset="-120"/>
+              </a:rPr>
+              <a:t>✅ Recipe video search — YouTube integration with smart ranking</a:t>
+            </a:r>
+            <a:endParaRPr lang="en-US" sz="1000" dirty="0"/>
+          </a:p>
+        </p:txBody>
+      </p:sp>
+      <p:sp>
+        <p:nvSpPr>
+          <p:cNvPr id="41" name="Text 39"/>
+          <p:cNvSpPr/>
+          <p:nvPr/>
+        </p:nvSpPr>
+        <p:spPr>
+          <a:xfrm>
+            <a:off x="320040" y="5623560"/>
+            <a:ext cx="8503920" cy="256032"/>
+          </a:xfrm>
+          <a:prstGeom prst="rect">
+            <a:avLst/>
+          </a:prstGeom>
+          <a:noFill/>
+          <a:ln/>
+        </p:spPr>
+        <p:txBody>
+          <a:bodyPr wrap="square" lIns="0" tIns="0" rIns="0" bIns="0" rtlCol="0" anchor="ctr"/>
+          <a:lstStyle/>
+          <a:p>
+            <a:pPr indent="0" marL="0">
+              <a:buNone/>
+            </a:pPr>
+            <a:r>
+              <a:rPr lang="en-US" sz="1000" dirty="0">
+                <a:solidFill>
+                  <a:srgbClr val="7C6A5E"/>
+                </a:solidFill>
+                <a:latin typeface="Calibri" pitchFamily="34" charset="0"/>
+                <a:ea typeface="Calibri" pitchFamily="34" charset="-122"/>
+                <a:cs typeface="Calibri" pitchFamily="34" charset="-120"/>
+              </a:rPr>
+              <a:t>✅ Order food integration — Swiggy, Zomato, EatSure deep links</a:t>
             </a:r>
             <a:endParaRPr lang="en-US" sz="1000" dirty="0"/>
           </a:p>
